--- a/Karan Padhiyar_Project Submission for EduentFoundation_IBMUniversityEngagement.pptx
+++ b/Karan Padhiyar_Project Submission for EduentFoundation_IBMUniversityEngagement.pptx
@@ -17200,25 +17200,17 @@
           </a:bodyPr>
           <a:lstStyle/>
           <a:p>
-            <a:pPr marL="0" marR="0" lvl="0" indent="0" algn="l" rtl="0">
+            <a:pPr lvl="0">
               <a:lnSpc>
                 <a:spcPct val="162162"/>
               </a:lnSpc>
-              <a:spcBef>
-                <a:spcPts val="0"/>
-              </a:spcBef>
-              <a:spcAft>
-                <a:spcPts val="0"/>
-              </a:spcAft>
               <a:buClr>
                 <a:srgbClr val="2B3541"/>
               </a:buClr>
               <a:buSzPts val="1850"/>
-              <a:buFont typeface="Times New Roman"/>
-              <a:buNone/>
             </a:pPr>
             <a:r>
-              <a:rPr lang="en-US" sz="1850" b="0" i="0" u="none" strike="noStrike" cap="none">
+              <a:rPr lang="en-US" sz="1850" b="0" i="0" u="none" strike="noStrike" cap="none" dirty="0" err="1" smtClean="0">
                 <a:solidFill>
                   <a:srgbClr val="2B3541"/>
                 </a:solidFill>
@@ -17227,30 +17219,10 @@
                 <a:cs typeface="Times New Roman"/>
                 <a:sym typeface="Times New Roman"/>
               </a:rPr>
-              <a:t>· Please create public github repository (Enable Add README  button while creating repository) with format – </a:t>
-            </a:r>
-            <a:endParaRPr/>
-          </a:p>
-          <a:p>
-            <a:pPr marL="0" marR="0" lvl="0" indent="0" algn="l" rtl="0">
-              <a:lnSpc>
-                <a:spcPct val="162162"/>
-              </a:lnSpc>
-              <a:spcBef>
-                <a:spcPts val="0"/>
-              </a:spcBef>
-              <a:spcAft>
-                <a:spcPts val="0"/>
-              </a:spcAft>
-              <a:buClr>
-                <a:srgbClr val="2B3541"/>
-              </a:buClr>
-              <a:buSzPts val="1850"/>
-              <a:buFont typeface="Times New Roman"/>
-              <a:buNone/>
-            </a:pPr>
-            <a:r>
-              <a:rPr lang="en-US" sz="1850" b="0" i="0" u="none" strike="noStrike" cap="none">
+              <a:t>Github</a:t>
+            </a:r>
+            <a:r>
+              <a:rPr lang="en-US" sz="1850" b="0" i="0" u="none" strike="noStrike" cap="none" dirty="0" smtClean="0">
                 <a:solidFill>
                   <a:srgbClr val="2B3541"/>
                 </a:solidFill>
@@ -17259,25 +17231,10 @@
                 <a:cs typeface="Times New Roman"/>
                 <a:sym typeface="Times New Roman"/>
               </a:rPr>
-              <a:t>Please test and Paste the working  Github URL –</a:t>
-            </a:r>
-            <a:endParaRPr/>
-          </a:p>
-          <a:p>
-            <a:pPr marL="0" marR="0" lvl="0" indent="0" algn="l" rtl="0">
-              <a:lnSpc>
-                <a:spcPct val="162162"/>
-              </a:lnSpc>
-              <a:spcBef>
-                <a:spcPts val="0"/>
-              </a:spcBef>
-              <a:spcAft>
-                <a:spcPts val="0"/>
-              </a:spcAft>
-              <a:buNone/>
-            </a:pPr>
-            <a:r>
-              <a:rPr lang="en-US" sz="1850" b="1" i="0" u="none" strike="noStrike" cap="none">
+              <a:t> </a:t>
+            </a:r>
+            <a:r>
+              <a:rPr lang="en-US" sz="1850" b="0" i="0" u="none" strike="noStrike" cap="none" dirty="0">
                 <a:solidFill>
                   <a:srgbClr val="2B3541"/>
                 </a:solidFill>
@@ -17286,10 +17243,10 @@
                 <a:cs typeface="Times New Roman"/>
                 <a:sym typeface="Times New Roman"/>
               </a:rPr>
-              <a:t>Make sure you have Uploaded following three files into your github repository  </a:t>
-            </a:r>
-            <a:r>
-              <a:rPr lang="en-US" sz="1850" b="0" i="0" u="none" strike="noStrike" cap="none">
+              <a:t>URL </a:t>
+            </a:r>
+            <a:r>
+              <a:rPr lang="en-US" sz="1850" dirty="0">
                 <a:solidFill>
                   <a:srgbClr val="2B3541"/>
                 </a:solidFill>
@@ -17298,10 +17255,36 @@
                 <a:cs typeface="Times New Roman"/>
                 <a:sym typeface="Times New Roman"/>
               </a:rPr>
-              <a:t/>
-            </a:r>
-            <a:br>
-              <a:rPr lang="en-US" sz="1850" b="0" i="0" u="none" strike="noStrike" cap="none">
+              <a:t> : </a:t>
+            </a:r>
+            <a:r>
+              <a:rPr lang="en-US" sz="1850" dirty="0">
+                <a:solidFill>
+                  <a:srgbClr val="2B3541"/>
+                </a:solidFill>
+                <a:latin typeface="Times New Roman"/>
+                <a:ea typeface="Times New Roman"/>
+                <a:cs typeface="Times New Roman"/>
+                <a:sym typeface="Times New Roman"/>
+                <a:hlinkClick r:id="rId3"/>
+              </a:rPr>
+              <a:t>https://</a:t>
+            </a:r>
+            <a:r>
+              <a:rPr lang="en-US" sz="1850" dirty="0" smtClean="0">
+                <a:solidFill>
+                  <a:srgbClr val="2B3541"/>
+                </a:solidFill>
+                <a:latin typeface="Times New Roman"/>
+                <a:ea typeface="Times New Roman"/>
+                <a:cs typeface="Times New Roman"/>
+                <a:sym typeface="Times New Roman"/>
+                <a:hlinkClick r:id="rId3"/>
+              </a:rPr>
+              <a:t>github.com/karan514451/intelligent-market-research-assistant</a:t>
+            </a:r>
+            <a:r>
+              <a:rPr lang="en-US" sz="1850" dirty="0" smtClean="0">
                 <a:solidFill>
                   <a:srgbClr val="2B3541"/>
                 </a:solidFill>
@@ -17310,20 +17293,9 @@
                 <a:cs typeface="Times New Roman"/>
                 <a:sym typeface="Times New Roman"/>
               </a:rPr>
-            </a:br>
-            <a:r>
-              <a:rPr lang="en-US" sz="1850" b="0" i="0" u="none" strike="noStrike" cap="none">
-                <a:solidFill>
-                  <a:srgbClr val="2B3541"/>
-                </a:solidFill>
-                <a:latin typeface="Times New Roman"/>
-                <a:ea typeface="Times New Roman"/>
-                <a:cs typeface="Times New Roman"/>
-                <a:sym typeface="Times New Roman"/>
-              </a:rPr>
-              <a:t>1) app.json file , 2) yourproblemstatement.pdf file  3) your projectpresntation.pptx file 4)any other files </a:t>
-            </a:r>
-            <a:endParaRPr/>
+              <a:t> </a:t>
+            </a:r>
+            <a:endParaRPr dirty="0"/>
           </a:p>
           <a:p>
             <a:pPr marL="0" marR="0" lvl="0" indent="0" algn="l" rtl="0">
@@ -17343,7 +17315,7 @@
               <a:buFont typeface="Times New Roman"/>
               <a:buNone/>
             </a:pPr>
-            <a:endParaRPr sz="1850" b="0" i="0" u="none" strike="noStrike" cap="none">
+            <a:endParaRPr sz="1850" b="0" i="0" u="none" strike="noStrike" cap="none" dirty="0">
               <a:solidFill>
                 <a:srgbClr val="000000"/>
               </a:solidFill>
@@ -17586,7 +17558,7 @@
         </p:nvSpPr>
         <p:spPr>
           <a:xfrm>
-            <a:off x="1218724" y="420729"/>
+            <a:off x="954029" y="383759"/>
             <a:ext cx="6444496" cy="704017"/>
           </a:xfrm>
           <a:prstGeom prst="rect">
@@ -17621,7 +17593,7 @@
               <a:buNone/>
             </a:pPr>
             <a:r>
-              <a:rPr lang="en-US" sz="2400" b="1" i="0" u="none" strike="noStrike" cap="none">
+              <a:rPr lang="en-US" sz="2400" b="1" i="0" u="none" strike="noStrike" cap="none" dirty="0">
                 <a:solidFill>
                   <a:srgbClr val="000000"/>
                 </a:solidFill>
@@ -17632,7 +17604,7 @@
               </a:rPr>
               <a:t>Future Scope </a:t>
             </a:r>
-            <a:endParaRPr sz="2400" b="1" i="0" u="none" strike="noStrike" cap="none">
+            <a:endParaRPr sz="2400" b="1" i="0" u="none" strike="noStrike" cap="none" dirty="0">
               <a:solidFill>
                 <a:srgbClr val="000000"/>
               </a:solidFill>
@@ -17652,8 +17624,8 @@
         </p:nvSpPr>
         <p:spPr>
           <a:xfrm>
-            <a:off x="1218724" y="1221715"/>
-            <a:ext cx="9214580" cy="4277001"/>
+            <a:off x="5999747" y="1536736"/>
+            <a:ext cx="5406190" cy="4277001"/>
           </a:xfrm>
           <a:prstGeom prst="rect">
             <a:avLst/>
@@ -17669,152 +17641,73 @@
           </a:bodyPr>
           <a:lstStyle/>
           <a:p>
-            <a:pPr marL="0" marR="0" lvl="0" indent="0" algn="l" rtl="0">
-              <a:lnSpc>
-                <a:spcPct val="162162"/>
-              </a:lnSpc>
-              <a:spcBef>
-                <a:spcPts val="0"/>
-              </a:spcBef>
-              <a:spcAft>
-                <a:spcPts val="0"/>
-              </a:spcAft>
-              <a:buClr>
-                <a:srgbClr val="2B3541"/>
-              </a:buClr>
-              <a:buSzPts val="1850"/>
-              <a:buFont typeface="Times New Roman"/>
-              <a:buNone/>
-            </a:pPr>
-            <a:r>
-              <a:rPr lang="en-US" sz="1850" b="1" i="0" u="none" strike="noStrike" cap="none">
-                <a:solidFill>
-                  <a:srgbClr val="2B3541"/>
-                </a:solidFill>
-                <a:latin typeface="Times New Roman"/>
-                <a:ea typeface="Times New Roman"/>
-                <a:cs typeface="Times New Roman"/>
-                <a:sym typeface="Times New Roman"/>
-              </a:rPr>
-              <a:t>1.Integration with Wearables &amp; Health Devices – </a:t>
-            </a:r>
-            <a:endParaRPr/>
-          </a:p>
-          <a:p>
-            <a:pPr marL="0" marR="0" lvl="0" indent="0" algn="l" rtl="0">
-              <a:lnSpc>
-                <a:spcPct val="162162"/>
-              </a:lnSpc>
-              <a:spcBef>
-                <a:spcPts val="0"/>
-              </a:spcBef>
-              <a:spcAft>
-                <a:spcPts val="0"/>
-              </a:spcAft>
-              <a:buClr>
-                <a:srgbClr val="2B3541"/>
-              </a:buClr>
-              <a:buSzPts val="1850"/>
-              <a:buFont typeface="Times New Roman"/>
-              <a:buNone/>
-            </a:pPr>
-            <a:r>
-              <a:rPr lang="en-US" sz="1850" b="0" i="0" u="none" strike="noStrike" cap="none">
-                <a:solidFill>
-                  <a:srgbClr val="2B3541"/>
-                </a:solidFill>
-                <a:latin typeface="Times New Roman"/>
-                <a:ea typeface="Times New Roman"/>
-                <a:cs typeface="Times New Roman"/>
-                <a:sym typeface="Times New Roman"/>
-              </a:rPr>
-              <a:t>The system can be integrated with smartwatches and fitness trackers to collect real-time data such as steps, calories burned, heart rate, and sleep patterns. This will enable the Nutrition Agent to provide more accurate and dynamic diet recommendations based on actual user activity and health metrics.</a:t>
-            </a:r>
-            <a:endParaRPr/>
-          </a:p>
-          <a:p>
-            <a:pPr marL="0" marR="0" lvl="0" indent="0" algn="l" rtl="0">
-              <a:lnSpc>
-                <a:spcPct val="162162"/>
-              </a:lnSpc>
-              <a:spcBef>
-                <a:spcPts val="0"/>
-              </a:spcBef>
-              <a:spcAft>
-                <a:spcPts val="0"/>
-              </a:spcAft>
-              <a:buClr>
-                <a:srgbClr val="2B3541"/>
-              </a:buClr>
-              <a:buSzPts val="1850"/>
-              <a:buFont typeface="Times New Roman"/>
-              <a:buNone/>
-            </a:pPr>
-            <a:r>
-              <a:rPr lang="en-US" sz="1850" b="1" i="0" u="none" strike="noStrike" cap="none">
-                <a:solidFill>
-                  <a:srgbClr val="2B3541"/>
-                </a:solidFill>
-                <a:latin typeface="Times New Roman"/>
-                <a:ea typeface="Times New Roman"/>
-                <a:cs typeface="Times New Roman"/>
-                <a:sym typeface="Times New Roman"/>
-              </a:rPr>
-              <a:t>2.AI-Powered Voice Assistant &amp; Multilingual Support </a:t>
-            </a:r>
-            <a:r>
-              <a:rPr lang="en-US" sz="1850" b="0" i="0" u="none" strike="noStrike" cap="none">
-                <a:solidFill>
-                  <a:srgbClr val="2B3541"/>
-                </a:solidFill>
-                <a:latin typeface="Times New Roman"/>
-                <a:ea typeface="Times New Roman"/>
-                <a:cs typeface="Times New Roman"/>
-                <a:sym typeface="Times New Roman"/>
-              </a:rPr>
-              <a:t>– </a:t>
-            </a:r>
-            <a:endParaRPr/>
-          </a:p>
-          <a:p>
-            <a:pPr marL="0" marR="0" lvl="0" indent="0" algn="l" rtl="0">
-              <a:lnSpc>
-                <a:spcPct val="162162"/>
-              </a:lnSpc>
-              <a:spcBef>
-                <a:spcPts val="0"/>
-              </a:spcBef>
-              <a:spcAft>
-                <a:spcPts val="0"/>
-              </a:spcAft>
-              <a:buClr>
-                <a:srgbClr val="2B3541"/>
-              </a:buClr>
-              <a:buSzPts val="1850"/>
-              <a:buFont typeface="Times New Roman"/>
-              <a:buNone/>
-            </a:pPr>
-            <a:r>
-              <a:rPr lang="en-US" sz="1850" b="0" i="0" u="none" strike="noStrike" cap="none">
-                <a:solidFill>
-                  <a:srgbClr val="2B3541"/>
-                </a:solidFill>
-                <a:latin typeface="Times New Roman"/>
-                <a:ea typeface="Times New Roman"/>
-                <a:cs typeface="Times New Roman"/>
-                <a:sym typeface="Times New Roman"/>
-              </a:rPr>
-              <a:t>Enhancing the system with a voice-enabled assistant and support for multiple languages will improve accessibility. Users can interact naturally in their preferred language, making the solution more inclusive and suitable for diverse populations, especially in regions with varied linguistic backgrounds.</a:t>
-            </a:r>
-            <a:endParaRPr sz="1850" b="0" i="0" u="none" strike="noStrike" cap="none">
-              <a:solidFill>
-                <a:srgbClr val="000000"/>
-              </a:solidFill>
-              <a:latin typeface="Times New Roman"/>
-              <a:ea typeface="Times New Roman"/>
-              <a:cs typeface="Times New Roman"/>
-              <a:sym typeface="Times New Roman"/>
-            </a:endParaRPr>
+            <a:r>
+              <a:rPr lang="en-US" sz="2000" b="1" dirty="0"/>
+              <a:t>5. AI-Powered Competitive Benchmarking</a:t>
+            </a:r>
+          </a:p>
+          <a:p>
+            <a:r>
+              <a:rPr lang="en-US" sz="2000" dirty="0"/>
+              <a:t>Automated competitor ranking</a:t>
+            </a:r>
+            <a:r>
+              <a:rPr lang="en-US" sz="2000" dirty="0" smtClean="0"/>
+              <a:t>.</a:t>
+            </a:r>
+          </a:p>
+          <a:p>
+            <a:endParaRPr lang="en-US" sz="2000" dirty="0"/>
+          </a:p>
+          <a:p>
+            <a:r>
+              <a:rPr lang="en-US" sz="2000" b="1" dirty="0"/>
+              <a:t>6. Predictive Investment Intelligence</a:t>
+            </a:r>
+          </a:p>
+          <a:p>
+            <a:r>
+              <a:rPr lang="en-US" sz="2000" dirty="0"/>
+              <a:t>Identify high-growth sectors and opportunities</a:t>
+            </a:r>
+            <a:r>
+              <a:rPr lang="en-US" sz="2000" dirty="0" smtClean="0"/>
+              <a:t>.</a:t>
+            </a:r>
+          </a:p>
+          <a:p>
+            <a:endParaRPr lang="en-US" sz="2000" dirty="0"/>
+          </a:p>
+          <a:p>
+            <a:r>
+              <a:rPr lang="en-US" sz="2000" b="1" dirty="0"/>
+              <a:t>7. Automated Strategic Recommendations</a:t>
+            </a:r>
+          </a:p>
+          <a:p>
+            <a:r>
+              <a:rPr lang="en-US" sz="2000" dirty="0"/>
+              <a:t>Suggest business actions based on market changes</a:t>
+            </a:r>
+            <a:r>
+              <a:rPr lang="en-US" sz="2000" dirty="0" smtClean="0"/>
+              <a:t>.</a:t>
+            </a:r>
+          </a:p>
+          <a:p>
+            <a:endParaRPr lang="en-US" sz="2000" dirty="0"/>
+          </a:p>
+          <a:p>
+            <a:r>
+              <a:rPr lang="en-US" sz="2000" b="1" dirty="0"/>
+              <a:t>8. Mobile Application</a:t>
+            </a:r>
+          </a:p>
+          <a:p>
+            <a:r>
+              <a:rPr lang="en-US" sz="2000" dirty="0"/>
+              <a:t>Access insights from anywhere.</a:t>
+            </a:r>
           </a:p>
         </p:txBody>
       </p:sp>
@@ -18013,6 +17906,121 @@
               <a:cs typeface="Times New Roman"/>
               <a:sym typeface="Times New Roman"/>
             </a:endParaRPr>
+          </a:p>
+        </p:txBody>
+      </p:sp>
+      <p:sp>
+        <p:nvSpPr>
+          <p:cNvPr id="7" name="Google Shape;176;p43"/>
+          <p:cNvSpPr/>
+          <p:nvPr/>
+        </p:nvSpPr>
+        <p:spPr>
+          <a:xfrm>
+            <a:off x="954029" y="1574385"/>
+            <a:ext cx="4861234" cy="4277001"/>
+          </a:xfrm>
+          <a:prstGeom prst="rect">
+            <a:avLst/>
+          </a:prstGeom>
+          <a:noFill/>
+          <a:ln>
+            <a:noFill/>
+          </a:ln>
+        </p:spPr>
+        <p:txBody>
+          <a:bodyPr spcFirstLastPara="1" wrap="square" lIns="0" tIns="0" rIns="0" bIns="0" anchor="t" anchorCtr="0">
+            <a:noAutofit/>
+          </a:bodyPr>
+          <a:lstStyle/>
+          <a:p>
+            <a:r>
+              <a:rPr lang="en-IN" sz="2000" b="1" dirty="0" smtClean="0"/>
+              <a:t>1</a:t>
+            </a:r>
+            <a:r>
+              <a:rPr lang="en-IN" sz="2000" b="1" dirty="0"/>
+              <a:t>. CRM Integration</a:t>
+            </a:r>
+          </a:p>
+          <a:p>
+            <a:r>
+              <a:rPr lang="en-IN" sz="2000" dirty="0"/>
+              <a:t>Connect Salesforce, </a:t>
+            </a:r>
+            <a:r>
+              <a:rPr lang="en-IN" sz="2000" dirty="0" err="1"/>
+              <a:t>HubSpot</a:t>
+            </a:r>
+            <a:r>
+              <a:rPr lang="en-IN" sz="2000" dirty="0"/>
+              <a:t>, and </a:t>
+            </a:r>
+            <a:r>
+              <a:rPr lang="en-IN" sz="2000" dirty="0" err="1"/>
+              <a:t>Zoho</a:t>
+            </a:r>
+            <a:r>
+              <a:rPr lang="en-IN" sz="2000" dirty="0" smtClean="0"/>
+              <a:t>.</a:t>
+            </a:r>
+          </a:p>
+          <a:p>
+            <a:endParaRPr lang="en-IN" sz="2000" dirty="0"/>
+          </a:p>
+          <a:p>
+            <a:r>
+              <a:rPr lang="en-IN" sz="2000" b="1" dirty="0"/>
+              <a:t>2. Real-Time Financial Market Analysis</a:t>
+            </a:r>
+          </a:p>
+          <a:p>
+            <a:r>
+              <a:rPr lang="en-IN" sz="2000" dirty="0"/>
+              <a:t>Monitor stocks and economic indicators</a:t>
+            </a:r>
+            <a:r>
+              <a:rPr lang="en-IN" sz="2000" dirty="0" smtClean="0"/>
+              <a:t>.</a:t>
+            </a:r>
+          </a:p>
+          <a:p>
+            <a:endParaRPr lang="en-IN" sz="2000" dirty="0"/>
+          </a:p>
+          <a:p>
+            <a:r>
+              <a:rPr lang="en-IN" sz="2000" b="1" dirty="0"/>
+              <a:t>3. Voice-Based Research Assistant</a:t>
+            </a:r>
+          </a:p>
+          <a:p>
+            <a:r>
+              <a:rPr lang="en-IN" sz="2000" dirty="0"/>
+              <a:t>Enable conversational market intelligence</a:t>
+            </a:r>
+            <a:r>
+              <a:rPr lang="en-IN" sz="2000" dirty="0" smtClean="0"/>
+              <a:t>.</a:t>
+            </a:r>
+          </a:p>
+          <a:p>
+            <a:endParaRPr lang="en-IN" sz="2000" dirty="0"/>
+          </a:p>
+          <a:p>
+            <a:r>
+              <a:rPr lang="en-IN" sz="2000" b="1" dirty="0"/>
+              <a:t>4. Multilingual Research Support</a:t>
+            </a:r>
+          </a:p>
+          <a:p>
+            <a:r>
+              <a:rPr lang="en-IN" sz="2000" dirty="0" err="1"/>
+              <a:t>Analyze</a:t>
+            </a:r>
+            <a:r>
+              <a:rPr lang="en-IN" sz="2000" dirty="0"/>
+              <a:t> global markets in multiple languages.</a:t>
+            </a:r>
           </a:p>
         </p:txBody>
       </p:sp>
@@ -18051,13 +18059,13 @@
           <a:blip r:embed="rId3">
             <a:alphaModFix/>
           </a:blip>
-          <a:srcRect/>
+          <a:srcRect b="20927"/>
           <a:stretch/>
         </p:blipFill>
         <p:spPr>
           <a:xfrm>
-            <a:off x="0" y="2190302"/>
-            <a:ext cx="12192000" cy="2477396"/>
+            <a:off x="0" y="2190301"/>
+            <a:ext cx="12192000" cy="2060857"/>
           </a:xfrm>
           <a:prstGeom prst="rect">
             <a:avLst/>
